--- a/slides/release/09__module9.pptx
+++ b/slides/release/09__module9.pptx
@@ -44,6 +44,9 @@
     <p:sldId id="286" r:id="rId39"/>
     <p:sldId id="287" r:id="rId40"/>
     <p:sldId id="288" r:id="rId41"/>
+    <p:sldId id="289" r:id="rId42"/>
+    <p:sldId id="290" r:id="rId43"/>
+    <p:sldId id="291" r:id="rId44"/>
   </p:sldIdLst>
   <p:sldSz cx="9372600" cy="8297863"/>
   <p:notesSz cx="7315200" cy="9601200"/>
@@ -4223,6 +4226,11 @@
           <a:lstStyle/>
           <a:p>
             <a:r>
+              <a:t> Enterprise agent security: task authority and independently enforced boundaries</a:t>
+            </a:r>
+          </a:p>
+          <a:p>
+            <a:r>
               <a:t> Traditional WAF vs AI gateway — a principled comparison</a:t>
             </a:r>
           </a:p>
@@ -6935,7 +6943,7 @@
           <a:lstStyle/>
           <a:p>
             <a:r>
-              <a:t>Module 9 Summary</a:t>
+              <a:t>Shared Responsibility for Hosted Agents</a:t>
             </a:r>
           </a:p>
         </p:txBody>
@@ -6956,37 +6964,35 @@
           <a:lstStyle/>
           <a:p>
             <a:r>
-              <a:t> Cloud WAFs (AWS, Azure, Cloudflare) provide HTTP-layer protection for AI endpoints but need AI gateways for semantic coverage</a:t>
-            </a:r>
-          </a:p>
-          <a:p>
-            <a:r>
-              <a:t> AWS WAF + Bedrock Guardrails, Azure WAF + Prompt Shields, and Cloudflare WAF + AI Gateway each form a coherent native stack</a:t>
-            </a:r>
-          </a:p>
-          <a:p>
-            <a:r>
-              <a:t> Envoy ext_authz and Kong AI Gateway are the leading self-hosted options for semantic AI filtering</a:t>
-            </a:r>
-          </a:p>
-          <a:p>
-            <a:r>
-              <a:t> NGINX can handle token estimation and rate limiting via NJS modules</a:t>
-            </a:r>
-          </a:p>
-          <a:p>
-            <a:r>
-              <a:t> Proxy-based and semantic filtering are complementary — use both</a:t>
-            </a:r>
-          </a:p>
-          <a:p>
-            <a:r>
-              <a:t> Layer selection matters: put each control at the layer that can enforce it most reliably</a:t>
-            </a:r>
-          </a:p>
-          <a:p>
-            <a:r>
-              <a:t> No cloud product covers every AI security requirement — architecture is always multi-layer</a:t>
+              <a:t> Provider-managed inference, harnesses, and enterprise connectors may sit in</a:t>
+            </a:r>
+            <a:r>
+              <a:t> different trust domains.</a:t>
+            </a:r>
+          </a:p>
+          <a:p>
+            <a:r>
+              <a:t> Name the owner of each runtime, credential store, and resource policy</a:t>
+            </a:r>
+          </a:p>
+          <a:p>
+            <a:r>
+              <a:t> Identify which controls the enterprise can configure and test</a:t>
+            </a:r>
+          </a:p>
+          <a:p>
+            <a:r>
+              <a:t> Request evidence for controls operated by the provider</a:t>
+            </a:r>
+          </a:p>
+          <a:p>
+            <a:r>
+              <a:t> Keep customer-managed connector responsibilities explicit</a:t>
+            </a:r>
+          </a:p>
+          <a:p>
+            <a:r>
+              <a:t> A remotely hosted agent does not make every connected system provider-managed.</a:t>
             </a:r>
           </a:p>
         </p:txBody>
@@ -7058,7 +7064,7 @@
           <a:lstStyle/>
           <a:p>
             <a:r>
-              <a:t>What's Next</a:t>
+              <a:t>Place the Gateway Near the Effect</a:t>
             </a:r>
           </a:p>
         </p:txBody>
@@ -7079,28 +7085,38 @@
           <a:lstStyle/>
           <a:p>
             <a:r>
-              <a:rPr b="1"/>
-              <a:t> Module 10 — Building a Layered AI Defense</a:t>
-            </a:r>
-          </a:p>
-          <a:p>
-            <a:r>
-              <a:t> We move from individual products to complete defense architecture:</a:t>
-            </a:r>
-          </a:p>
-          <a:p>
-            <a:r>
-              <a:t> The 10-layer AI defense model</a:t>
-            </a:r>
-          </a:p>
-          <a:p>
-            <a:r>
-              <a:t> From WAF engineer to AI Runtime Security engineer</a:t>
-            </a:r>
-          </a:p>
-          <a:p>
-            <a:r>
-              <a:t> Capstone preview: defending a simulated enterprise AI assistant</a:t>
+              <a:t> A model gateway can observe inference traffic without knowing whether an</a:t>
+            </a:r>
+            <a:r>
+              <a:t> application action is authorized.</a:t>
+            </a:r>
+          </a:p>
+          <a:p>
+            <a:r>
+              <a:t> Application policy enforces tenant and record ownership</a:t>
+            </a:r>
+          </a:p>
+          <a:p>
+            <a:r>
+              <a:t> Repository protections constrain changes and merge authority</a:t>
+            </a:r>
+          </a:p>
+          <a:p>
+            <a:r>
+              <a:t> Destination and network controls restrict data movement</a:t>
+            </a:r>
+          </a:p>
+          <a:p>
+            <a:r>
+              <a:t> An action gateway evaluates task scope before tool execution</a:t>
+            </a:r>
+          </a:p>
+          <a:p>
+            <a:r>
+              <a:t> Map bypass paths. A shell with direct egress may never pass through your model</a:t>
+            </a:r>
+            <a:r>
+              <a:t> gateway. A product label alone does not establish enforcement coverage.</a:t>
             </a:r>
           </a:p>
         </p:txBody>
@@ -7147,6 +7163,355 @@
 </file>
 
 <file path=ppt/slides/slide33.xml><?xml version="1.0" encoding="utf-8"?>
+<p:sld xmlns:a="http://schemas.openxmlformats.org/drawingml/2006/main" xmlns:p="http://schemas.openxmlformats.org/presentationml/2006/main" xmlns:r="http://schemas.openxmlformats.org/officeDocument/2006/relationships">
+  <p:cSld>
+    <p:spTree>
+      <p:nvGrpSpPr>
+        <p:cNvPr id="1" name=""/>
+        <p:cNvGrpSpPr/>
+        <p:nvPr/>
+      </p:nvGrpSpPr>
+      <p:grpSpPr/>
+      <p:sp>
+        <p:nvSpPr>
+          <p:cNvPr id="2" name="Title 1"/>
+          <p:cNvSpPr>
+            <a:spLocks noGrp="1"/>
+          </p:cNvSpPr>
+          <p:nvPr>
+            <p:ph type="title"/>
+          </p:nvPr>
+        </p:nvSpPr>
+        <p:spPr/>
+        <p:txBody>
+          <a:bodyPr/>
+          <a:lstStyle/>
+          <a:p>
+            <a:r>
+              <a:t>Reading — Agent Security in the Enterprise</a:t>
+            </a:r>
+          </a:p>
+        </p:txBody>
+      </p:sp>
+      <p:sp>
+        <p:nvSpPr>
+          <p:cNvPr id="3" name="Content Placeholder 2"/>
+          <p:cNvSpPr>
+            <a:spLocks noGrp="1"/>
+          </p:cNvSpPr>
+          <p:nvPr>
+            <p:ph idx="1"/>
+          </p:nvPr>
+        </p:nvSpPr>
+        <p:spPr/>
+        <p:txBody>
+          <a:bodyPr/>
+          <a:lstStyle/>
+          <a:p>
+            <a:r>
+              <a:t> OpenAI, August 2026: task authority, independent boundaries, capability</a:t>
+            </a:r>
+            <a:r>
+              <a:t> composition, and incident response.</a:t>
+            </a:r>
+          </a:p>
+          <a:p>
+            <a:r>
+              <a:rPr>
+                <a:hlinkClick r:id="rId2"/>
+              </a:rPr>
+              <a:t> Download the paper</a:t>
+            </a:r>
+          </a:p>
+          <a:p>
+            <a:r>
+              <a:t> These are architectural recommendations. The classroom fixtures illustrate them;</a:t>
+            </a:r>
+            <a:r>
+              <a:t> they do not certify a product or reproduce a production security architecture.</a:t>
+            </a:r>
+          </a:p>
+        </p:txBody>
+      </p:sp>
+      <p:sp>
+        <p:nvSpPr>
+          <p:cNvPr id="4" name="TextBox 3"/>
+          <p:cNvSpPr txBox="1"/>
+          <p:nvPr/>
+        </p:nvSpPr>
+        <p:spPr>
+          <a:xfrm>
+            <a:off x="704088" y="8065008"/>
+            <a:ext cx="8915400" cy="228600"/>
+          </a:xfrm>
+          <a:prstGeom prst="rect">
+            <a:avLst/>
+          </a:prstGeom>
+          <a:noFill/>
+        </p:spPr>
+        <p:txBody>
+          <a:bodyPr wrap="none">
+            <a:spAutoFit/>
+          </a:bodyPr>
+          <a:lstStyle/>
+          <a:p>
+            <a:r>
+              <a:rPr sz="800">
+                <a:solidFill>
+                  <a:srgbClr val="000000"/>
+                </a:solidFill>
+              </a:rPr>
+              <a:t>Copyright © 2026 by Elephant Scale, All Rights Reserved</a:t>
+            </a:r>
+          </a:p>
+        </p:txBody>
+      </p:sp>
+    </p:spTree>
+  </p:cSld>
+  <p:clrMapOvr>
+    <a:masterClrMapping/>
+  </p:clrMapOvr>
+</p:sld>
+</file>
+
+<file path=ppt/slides/slide34.xml><?xml version="1.0" encoding="utf-8"?>
+<p:sld xmlns:a="http://schemas.openxmlformats.org/drawingml/2006/main" xmlns:p="http://schemas.openxmlformats.org/presentationml/2006/main" xmlns:r="http://schemas.openxmlformats.org/officeDocument/2006/relationships">
+  <p:cSld>
+    <p:spTree>
+      <p:nvGrpSpPr>
+        <p:cNvPr id="1" name=""/>
+        <p:cNvGrpSpPr/>
+        <p:nvPr/>
+      </p:nvGrpSpPr>
+      <p:grpSpPr/>
+      <p:sp>
+        <p:nvSpPr>
+          <p:cNvPr id="2" name="Title 1"/>
+          <p:cNvSpPr>
+            <a:spLocks noGrp="1"/>
+          </p:cNvSpPr>
+          <p:nvPr>
+            <p:ph type="title"/>
+          </p:nvPr>
+        </p:nvSpPr>
+        <p:spPr/>
+        <p:txBody>
+          <a:bodyPr/>
+          <a:lstStyle/>
+          <a:p>
+            <a:r>
+              <a:t>Module 9 Summary</a:t>
+            </a:r>
+          </a:p>
+        </p:txBody>
+      </p:sp>
+      <p:sp>
+        <p:nvSpPr>
+          <p:cNvPr id="3" name="Content Placeholder 2"/>
+          <p:cNvSpPr>
+            <a:spLocks noGrp="1"/>
+          </p:cNvSpPr>
+          <p:nvPr>
+            <p:ph idx="1"/>
+          </p:nvPr>
+        </p:nvSpPr>
+        <p:spPr/>
+        <p:txBody>
+          <a:bodyPr/>
+          <a:lstStyle/>
+          <a:p>
+            <a:r>
+              <a:t> Cloud WAFs (AWS, Azure, Cloudflare) provide HTTP-layer protection for AI endpoints but need AI gateways for semantic coverage</a:t>
+            </a:r>
+          </a:p>
+          <a:p>
+            <a:r>
+              <a:t> AWS WAF + Bedrock Guardrails, Azure WAF + Prompt Shields, and Cloudflare WAF + AI Gateway each form a coherent native stack</a:t>
+            </a:r>
+          </a:p>
+          <a:p>
+            <a:r>
+              <a:t> Envoy ext_authz and Kong AI Gateway are the leading self-hosted options for semantic AI filtering</a:t>
+            </a:r>
+          </a:p>
+          <a:p>
+            <a:r>
+              <a:t> NGINX can handle token estimation and rate limiting via NJS modules</a:t>
+            </a:r>
+          </a:p>
+          <a:p>
+            <a:r>
+              <a:t> Proxy-based and semantic filtering are complementary — use both</a:t>
+            </a:r>
+          </a:p>
+          <a:p>
+            <a:r>
+              <a:t> Layer selection matters: put each control at the layer that can enforce it most reliably</a:t>
+            </a:r>
+          </a:p>
+          <a:p>
+            <a:r>
+              <a:t> No cloud product covers every AI security requirement — architecture is always multi-layer</a:t>
+            </a:r>
+          </a:p>
+        </p:txBody>
+      </p:sp>
+      <p:sp>
+        <p:nvSpPr>
+          <p:cNvPr id="4" name="TextBox 3"/>
+          <p:cNvSpPr txBox="1"/>
+          <p:nvPr/>
+        </p:nvSpPr>
+        <p:spPr>
+          <a:xfrm>
+            <a:off x="704088" y="8065008"/>
+            <a:ext cx="8915400" cy="228600"/>
+          </a:xfrm>
+          <a:prstGeom prst="rect">
+            <a:avLst/>
+          </a:prstGeom>
+          <a:noFill/>
+        </p:spPr>
+        <p:txBody>
+          <a:bodyPr wrap="none">
+            <a:spAutoFit/>
+          </a:bodyPr>
+          <a:lstStyle/>
+          <a:p>
+            <a:r>
+              <a:rPr sz="800">
+                <a:solidFill>
+                  <a:srgbClr val="000000"/>
+                </a:solidFill>
+              </a:rPr>
+              <a:t>Copyright © 2026 by Elephant Scale, All Rights Reserved</a:t>
+            </a:r>
+          </a:p>
+        </p:txBody>
+      </p:sp>
+    </p:spTree>
+  </p:cSld>
+  <p:clrMapOvr>
+    <a:masterClrMapping/>
+  </p:clrMapOvr>
+</p:sld>
+</file>
+
+<file path=ppt/slides/slide35.xml><?xml version="1.0" encoding="utf-8"?>
+<p:sld xmlns:a="http://schemas.openxmlformats.org/drawingml/2006/main" xmlns:p="http://schemas.openxmlformats.org/presentationml/2006/main" xmlns:r="http://schemas.openxmlformats.org/officeDocument/2006/relationships">
+  <p:cSld>
+    <p:spTree>
+      <p:nvGrpSpPr>
+        <p:cNvPr id="1" name=""/>
+        <p:cNvGrpSpPr/>
+        <p:nvPr/>
+      </p:nvGrpSpPr>
+      <p:grpSpPr/>
+      <p:sp>
+        <p:nvSpPr>
+          <p:cNvPr id="2" name="Title 1"/>
+          <p:cNvSpPr>
+            <a:spLocks noGrp="1"/>
+          </p:cNvSpPr>
+          <p:nvPr>
+            <p:ph type="title"/>
+          </p:nvPr>
+        </p:nvSpPr>
+        <p:spPr/>
+        <p:txBody>
+          <a:bodyPr/>
+          <a:lstStyle/>
+          <a:p>
+            <a:r>
+              <a:t>What's Next</a:t>
+            </a:r>
+          </a:p>
+        </p:txBody>
+      </p:sp>
+      <p:sp>
+        <p:nvSpPr>
+          <p:cNvPr id="3" name="Content Placeholder 2"/>
+          <p:cNvSpPr>
+            <a:spLocks noGrp="1"/>
+          </p:cNvSpPr>
+          <p:nvPr>
+            <p:ph idx="1"/>
+          </p:nvPr>
+        </p:nvSpPr>
+        <p:spPr/>
+        <p:txBody>
+          <a:bodyPr/>
+          <a:lstStyle/>
+          <a:p>
+            <a:r>
+              <a:rPr b="1"/>
+              <a:t> Module 10 — Building a Layered AI Defense</a:t>
+            </a:r>
+          </a:p>
+          <a:p>
+            <a:r>
+              <a:t> We move from individual products to complete defense architecture:</a:t>
+            </a:r>
+          </a:p>
+          <a:p>
+            <a:r>
+              <a:t> The 10-layer AI defense model</a:t>
+            </a:r>
+          </a:p>
+          <a:p>
+            <a:r>
+              <a:t> From WAF engineer to AI Runtime Security engineer</a:t>
+            </a:r>
+          </a:p>
+          <a:p>
+            <a:r>
+              <a:t> Capstone preview: defending a simulated enterprise AI assistant</a:t>
+            </a:r>
+          </a:p>
+        </p:txBody>
+      </p:sp>
+      <p:sp>
+        <p:nvSpPr>
+          <p:cNvPr id="4" name="TextBox 3"/>
+          <p:cNvSpPr txBox="1"/>
+          <p:nvPr/>
+        </p:nvSpPr>
+        <p:spPr>
+          <a:xfrm>
+            <a:off x="704088" y="8065008"/>
+            <a:ext cx="8915400" cy="228600"/>
+          </a:xfrm>
+          <a:prstGeom prst="rect">
+            <a:avLst/>
+          </a:prstGeom>
+          <a:noFill/>
+        </p:spPr>
+        <p:txBody>
+          <a:bodyPr wrap="none">
+            <a:spAutoFit/>
+          </a:bodyPr>
+          <a:lstStyle/>
+          <a:p>
+            <a:r>
+              <a:rPr sz="800">
+                <a:solidFill>
+                  <a:srgbClr val="000000"/>
+                </a:solidFill>
+              </a:rPr>
+              <a:t>Copyright © 2026 by Elephant Scale, All Rights Reserved</a:t>
+            </a:r>
+          </a:p>
+        </p:txBody>
+      </p:sp>
+    </p:spTree>
+  </p:cSld>
+  <p:clrMapOvr>
+    <a:masterClrMapping/>
+  </p:clrMapOvr>
+</p:sld>
+</file>
+
+<file path=ppt/slides/slide36.xml><?xml version="1.0" encoding="utf-8"?>
 <p:sld xmlns:a="http://schemas.openxmlformats.org/drawingml/2006/main" xmlns:p="http://schemas.openxmlformats.org/presentationml/2006/main" xmlns:r="http://schemas.openxmlformats.org/officeDocument/2006/relationships">
   <p:cSld>
     <p:spTree>
